--- a/documents/Midterm_Presentation_Gian_Gamper_Jonas_Bratschi_Jann_Erhardt.pptx
+++ b/documents/Midterm_Presentation_Gian_Gamper_Jonas_Bratschi_Jann_Erhardt.pptx
@@ -6320,6 +6320,158 @@
           </a:prstGeom>
         </p:spPr>
       </p:pic>
+      <p:sp>
+        <p:nvSpPr>
+          <p:cNvPr id="3" name="Rectangle 2">
+            <a:extLst>
+              <a:ext uri="{FF2B5EF4-FFF2-40B4-BE49-F238E27FC236}">
+                <a16:creationId xmlns:a16="http://schemas.microsoft.com/office/drawing/2014/main" id="{9880EF6E-2F1C-DCF9-373A-891B1651CD66}"/>
+              </a:ext>
+            </a:extLst>
+          </p:cNvPr>
+          <p:cNvSpPr/>
+          <p:nvPr/>
+        </p:nvSpPr>
+        <p:spPr>
+          <a:xfrm>
+            <a:off x="458854" y="3801978"/>
+            <a:ext cx="2130342" cy="827773"/>
+          </a:xfrm>
+          <a:prstGeom prst="rect">
+            <a:avLst/>
+          </a:prstGeom>
+          <a:noFill/>
+          <a:ln w="50800">
+            <a:solidFill>
+              <a:srgbClr val="FF0000"/>
+            </a:solidFill>
+          </a:ln>
+        </p:spPr>
+        <p:style>
+          <a:lnRef idx="2">
+            <a:schemeClr val="accent1">
+              <a:shade val="15000"/>
+            </a:schemeClr>
+          </a:lnRef>
+          <a:fillRef idx="1">
+            <a:schemeClr val="accent1"/>
+          </a:fillRef>
+          <a:effectRef idx="0">
+            <a:schemeClr val="accent1"/>
+          </a:effectRef>
+          <a:fontRef idx="minor">
+            <a:schemeClr val="lt1"/>
+          </a:fontRef>
+        </p:style>
+        <p:txBody>
+          <a:bodyPr rtlCol="0" anchor="ctr"/>
+          <a:lstStyle/>
+          <a:p>
+            <a:pPr algn="ctr"/>
+            <a:endParaRPr lang="en-US"/>
+          </a:p>
+        </p:txBody>
+      </p:sp>
+      <p:sp>
+        <p:nvSpPr>
+          <p:cNvPr id="4" name="TextBox 3">
+            <a:extLst>
+              <a:ext uri="{FF2B5EF4-FFF2-40B4-BE49-F238E27FC236}">
+                <a16:creationId xmlns:a16="http://schemas.microsoft.com/office/drawing/2014/main" id="{28E59C1B-E145-3FD5-6711-5D7232B431DC}"/>
+              </a:ext>
+            </a:extLst>
+          </p:cNvPr>
+          <p:cNvSpPr txBox="1"/>
+          <p:nvPr/>
+        </p:nvSpPr>
+        <p:spPr>
+          <a:xfrm>
+            <a:off x="2141580" y="5115744"/>
+            <a:ext cx="1482213" cy="646331"/>
+          </a:xfrm>
+          <a:prstGeom prst="rect">
+            <a:avLst/>
+          </a:prstGeom>
+          <a:solidFill>
+            <a:schemeClr val="bg1"/>
+          </a:solidFill>
+          <a:ln w="50800">
+            <a:solidFill>
+              <a:srgbClr val="FF0000"/>
+            </a:solidFill>
+          </a:ln>
+        </p:spPr>
+        <p:txBody>
+          <a:bodyPr wrap="square" rtlCol="0">
+            <a:spAutoFit/>
+          </a:bodyPr>
+          <a:lstStyle/>
+          <a:p>
+            <a:pPr algn="ctr"/>
+            <a:r>
+              <a:rPr lang="en-US" dirty="0">
+                <a:solidFill>
+                  <a:srgbClr val="FF0000"/>
+                </a:solidFill>
+              </a:rPr>
+              <a:t>Batch fetching</a:t>
+            </a:r>
+          </a:p>
+        </p:txBody>
+      </p:sp>
+      <p:sp>
+        <p:nvSpPr>
+          <p:cNvPr id="5" name="Arc 4">
+            <a:extLst>
+              <a:ext uri="{FF2B5EF4-FFF2-40B4-BE49-F238E27FC236}">
+                <a16:creationId xmlns:a16="http://schemas.microsoft.com/office/drawing/2014/main" id="{E2E67518-129E-E7C7-137D-29E487D95133}"/>
+              </a:ext>
+            </a:extLst>
+          </p:cNvPr>
+          <p:cNvSpPr/>
+          <p:nvPr/>
+        </p:nvSpPr>
+        <p:spPr>
+          <a:xfrm rot="16200000">
+            <a:off x="1428674" y="4108449"/>
+            <a:ext cx="1425813" cy="1235108"/>
+          </a:xfrm>
+          <a:prstGeom prst="arc">
+            <a:avLst>
+              <a:gd name="adj1" fmla="val 10793885"/>
+              <a:gd name="adj2" fmla="val 16757343"/>
+            </a:avLst>
+          </a:prstGeom>
+          <a:ln w="50800">
+            <a:solidFill>
+              <a:srgbClr val="FF0000"/>
+            </a:solidFill>
+            <a:tailEnd type="triangle"/>
+          </a:ln>
+        </p:spPr>
+        <p:style>
+          <a:lnRef idx="2">
+            <a:schemeClr val="accent1"/>
+          </a:lnRef>
+          <a:fillRef idx="0">
+            <a:schemeClr val="accent1"/>
+          </a:fillRef>
+          <a:effectRef idx="1">
+            <a:schemeClr val="accent1"/>
+          </a:effectRef>
+          <a:fontRef idx="minor">
+            <a:schemeClr val="tx1"/>
+          </a:fontRef>
+        </p:style>
+        <p:txBody>
+          <a:bodyPr rtlCol="0" anchor="ctr"/>
+          <a:lstStyle/>
+          <a:p>
+            <a:pPr algn="ctr"/>
+            <a:endParaRPr lang="en-US"/>
+          </a:p>
+        </p:txBody>
+      </p:sp>
     </p:spTree>
     <p:extLst>
       <p:ext uri="{BB962C8B-B14F-4D97-AF65-F5344CB8AC3E}">
@@ -6330,6 +6482,140 @@
   <p:clrMapOvr>
     <a:masterClrMapping/>
   </p:clrMapOvr>
+  <p:timing>
+    <p:tnLst>
+      <p:par>
+        <p:cTn id="1" dur="indefinite" restart="never" nodeType="tmRoot">
+          <p:childTnLst>
+            <p:seq concurrent="1" nextAc="seek">
+              <p:cTn id="2" dur="indefinite" nodeType="mainSeq">
+                <p:childTnLst>
+                  <p:par>
+                    <p:cTn id="3" fill="hold">
+                      <p:stCondLst>
+                        <p:cond delay="indefinite"/>
+                      </p:stCondLst>
+                      <p:childTnLst>
+                        <p:par>
+                          <p:cTn id="4" fill="hold">
+                            <p:stCondLst>
+                              <p:cond delay="0"/>
+                            </p:stCondLst>
+                            <p:childTnLst>
+                              <p:par>
+                                <p:cTn id="5" presetID="1" presetClass="entr" presetSubtype="0" fill="hold" grpId="0" nodeType="clickEffect">
+                                  <p:stCondLst>
+                                    <p:cond delay="0"/>
+                                  </p:stCondLst>
+                                  <p:childTnLst>
+                                    <p:set>
+                                      <p:cBhvr>
+                                        <p:cTn id="6" dur="1" fill="hold">
+                                          <p:stCondLst>
+                                            <p:cond delay="0"/>
+                                          </p:stCondLst>
+                                        </p:cTn>
+                                        <p:tgtEl>
+                                          <p:spTgt spid="3"/>
+                                        </p:tgtEl>
+                                        <p:attrNameLst>
+                                          <p:attrName>style.visibility</p:attrName>
+                                        </p:attrNameLst>
+                                      </p:cBhvr>
+                                      <p:to>
+                                        <p:strVal val="visible"/>
+                                      </p:to>
+                                    </p:set>
+                                  </p:childTnLst>
+                                </p:cTn>
+                              </p:par>
+                              <p:par>
+                                <p:cTn id="7" presetID="1" presetClass="entr" presetSubtype="0" fill="hold" grpId="0" nodeType="withEffect">
+                                  <p:stCondLst>
+                                    <p:cond delay="0"/>
+                                  </p:stCondLst>
+                                  <p:childTnLst>
+                                    <p:set>
+                                      <p:cBhvr>
+                                        <p:cTn id="8" dur="1" fill="hold">
+                                          <p:stCondLst>
+                                            <p:cond delay="0"/>
+                                          </p:stCondLst>
+                                        </p:cTn>
+                                        <p:tgtEl>
+                                          <p:spTgt spid="4"/>
+                                        </p:tgtEl>
+                                        <p:attrNameLst>
+                                          <p:attrName>style.visibility</p:attrName>
+                                        </p:attrNameLst>
+                                      </p:cBhvr>
+                                      <p:to>
+                                        <p:strVal val="visible"/>
+                                      </p:to>
+                                    </p:set>
+                                  </p:childTnLst>
+                                </p:cTn>
+                              </p:par>
+                              <p:par>
+                                <p:cTn id="9" presetID="1" presetClass="entr" presetSubtype="0" fill="hold" grpId="0" nodeType="withEffect">
+                                  <p:stCondLst>
+                                    <p:cond delay="0"/>
+                                  </p:stCondLst>
+                                  <p:childTnLst>
+                                    <p:set>
+                                      <p:cBhvr>
+                                        <p:cTn id="10" dur="1" fill="hold">
+                                          <p:stCondLst>
+                                            <p:cond delay="0"/>
+                                          </p:stCondLst>
+                                        </p:cTn>
+                                        <p:tgtEl>
+                                          <p:spTgt spid="5"/>
+                                        </p:tgtEl>
+                                        <p:attrNameLst>
+                                          <p:attrName>style.visibility</p:attrName>
+                                        </p:attrNameLst>
+                                      </p:cBhvr>
+                                      <p:to>
+                                        <p:strVal val="visible"/>
+                                      </p:to>
+                                    </p:set>
+                                  </p:childTnLst>
+                                </p:cTn>
+                              </p:par>
+                            </p:childTnLst>
+                          </p:cTn>
+                        </p:par>
+                      </p:childTnLst>
+                    </p:cTn>
+                  </p:par>
+                </p:childTnLst>
+              </p:cTn>
+              <p:prevCondLst>
+                <p:cond evt="onPrev" delay="0">
+                  <p:tgtEl>
+                    <p:sldTgt/>
+                  </p:tgtEl>
+                </p:cond>
+              </p:prevCondLst>
+              <p:nextCondLst>
+                <p:cond evt="onNext" delay="0">
+                  <p:tgtEl>
+                    <p:sldTgt/>
+                  </p:tgtEl>
+                </p:cond>
+              </p:nextCondLst>
+            </p:seq>
+          </p:childTnLst>
+        </p:cTn>
+      </p:par>
+    </p:tnLst>
+    <p:bldLst>
+      <p:bldP spid="3" grpId="0" animBg="1"/>
+      <p:bldP spid="4" grpId="0" animBg="1"/>
+      <p:bldP spid="5" grpId="0" animBg="1"/>
+    </p:bldLst>
+  </p:timing>
 </p:sld>
 </file>
 

--- a/documents/Midterm_Presentation_Gian_Gamper_Jonas_Bratschi_Jann_Erhardt.pptx
+++ b/documents/Midterm_Presentation_Gian_Gamper_Jonas_Bratschi_Jann_Erhardt.pptx
@@ -222,7 +222,7 @@
           <a:p>
             <a:fld id="{93953CA5-27CA-3E4C-B0FF-C9EC7B03084B}" type="datetimeFigureOut">
               <a:rPr lang="en-US" smtClean="0"/>
-              <a:t>4/8/26</a:t>
+              <a:t>4/9/26</a:t>
             </a:fld>
             <a:endParaRPr lang="en-US"/>
           </a:p>
@@ -399,7 +399,7 @@
           <a:p>
             <a:fld id="{C76EF806-9F17-0240-A2CB-C874E7A0BE57}" type="datetimeFigureOut">
               <a:rPr lang="en-US" smtClean="0"/>
-              <a:t>4/8/26</a:t>
+              <a:t>4/9/26</a:t>
             </a:fld>
             <a:endParaRPr lang="en-US"/>
           </a:p>
@@ -813,7 +813,7 @@
           <a:p>
             <a:fld id="{263E4BC6-68E2-8341-BBA1-F5FD0A33C135}" type="datetimeFigureOut">
               <a:rPr lang="en-US" smtClean="0"/>
-              <a:t>4/8/26</a:t>
+              <a:t>4/9/26</a:t>
             </a:fld>
             <a:endParaRPr lang="en-US"/>
           </a:p>
@@ -1011,7 +1011,7 @@
           <a:p>
             <a:fld id="{263E4BC6-68E2-8341-BBA1-F5FD0A33C135}" type="datetimeFigureOut">
               <a:rPr lang="en-US" smtClean="0"/>
-              <a:t>4/8/26</a:t>
+              <a:t>4/9/26</a:t>
             </a:fld>
             <a:endParaRPr lang="en-US"/>
           </a:p>
@@ -1219,7 +1219,7 @@
           <a:p>
             <a:fld id="{263E4BC6-68E2-8341-BBA1-F5FD0A33C135}" type="datetimeFigureOut">
               <a:rPr lang="en-US" smtClean="0"/>
-              <a:t>4/8/26</a:t>
+              <a:t>4/9/26</a:t>
             </a:fld>
             <a:endParaRPr lang="en-US"/>
           </a:p>
@@ -1417,7 +1417,7 @@
           <a:p>
             <a:fld id="{263E4BC6-68E2-8341-BBA1-F5FD0A33C135}" type="datetimeFigureOut">
               <a:rPr lang="en-US" smtClean="0"/>
-              <a:t>4/8/26</a:t>
+              <a:t>4/9/26</a:t>
             </a:fld>
             <a:endParaRPr lang="en-US"/>
           </a:p>
@@ -1692,7 +1692,7 @@
           <a:p>
             <a:fld id="{263E4BC6-68E2-8341-BBA1-F5FD0A33C135}" type="datetimeFigureOut">
               <a:rPr lang="en-US" smtClean="0"/>
-              <a:t>4/8/26</a:t>
+              <a:t>4/9/26</a:t>
             </a:fld>
             <a:endParaRPr lang="en-US"/>
           </a:p>
@@ -1957,7 +1957,7 @@
           <a:p>
             <a:fld id="{263E4BC6-68E2-8341-BBA1-F5FD0A33C135}" type="datetimeFigureOut">
               <a:rPr lang="en-US" smtClean="0"/>
-              <a:t>4/8/26</a:t>
+              <a:t>4/9/26</a:t>
             </a:fld>
             <a:endParaRPr lang="en-US"/>
           </a:p>
@@ -2369,7 +2369,7 @@
           <a:p>
             <a:fld id="{263E4BC6-68E2-8341-BBA1-F5FD0A33C135}" type="datetimeFigureOut">
               <a:rPr lang="en-US" smtClean="0"/>
-              <a:t>4/8/26</a:t>
+              <a:t>4/9/26</a:t>
             </a:fld>
             <a:endParaRPr lang="en-US"/>
           </a:p>
@@ -2510,7 +2510,7 @@
           <a:p>
             <a:fld id="{263E4BC6-68E2-8341-BBA1-F5FD0A33C135}" type="datetimeFigureOut">
               <a:rPr lang="en-US" smtClean="0"/>
-              <a:t>4/8/26</a:t>
+              <a:t>4/9/26</a:t>
             </a:fld>
             <a:endParaRPr lang="en-US"/>
           </a:p>
@@ -2623,7 +2623,7 @@
           <a:p>
             <a:fld id="{263E4BC6-68E2-8341-BBA1-F5FD0A33C135}" type="datetimeFigureOut">
               <a:rPr lang="en-US" smtClean="0"/>
-              <a:t>4/8/26</a:t>
+              <a:t>4/9/26</a:t>
             </a:fld>
             <a:endParaRPr lang="en-US"/>
           </a:p>
@@ -2934,7 +2934,7 @@
           <a:p>
             <a:fld id="{263E4BC6-68E2-8341-BBA1-F5FD0A33C135}" type="datetimeFigureOut">
               <a:rPr lang="en-US" smtClean="0"/>
-              <a:t>4/8/26</a:t>
+              <a:t>4/9/26</a:t>
             </a:fld>
             <a:endParaRPr lang="en-US"/>
           </a:p>
@@ -3222,7 +3222,7 @@
           <a:p>
             <a:fld id="{263E4BC6-68E2-8341-BBA1-F5FD0A33C135}" type="datetimeFigureOut">
               <a:rPr lang="en-US" smtClean="0"/>
-              <a:t>4/8/26</a:t>
+              <a:t>4/9/26</a:t>
             </a:fld>
             <a:endParaRPr lang="en-US"/>
           </a:p>
@@ -3463,7 +3463,7 @@
           <a:p>
             <a:fld id="{263E4BC6-68E2-8341-BBA1-F5FD0A33C135}" type="datetimeFigureOut">
               <a:rPr lang="en-US" smtClean="0"/>
-              <a:t>4/8/26</a:t>
+              <a:t>4/9/26</a:t>
             </a:fld>
             <a:endParaRPr lang="en-US"/>
           </a:p>
@@ -5721,10 +5721,10 @@
       </p:sp>
       <p:pic>
         <p:nvPicPr>
-          <p:cNvPr id="5" name="Picture 4">
-            <a:extLst>
-              <a:ext uri="{FF2B5EF4-FFF2-40B4-BE49-F238E27FC236}">
-                <a16:creationId xmlns:a16="http://schemas.microsoft.com/office/drawing/2014/main" id="{9164872B-416D-2ACA-0F2F-E07F71C87810}"/>
+          <p:cNvPr id="4" name="Picture 3">
+            <a:extLst>
+              <a:ext uri="{FF2B5EF4-FFF2-40B4-BE49-F238E27FC236}">
+                <a16:creationId xmlns:a16="http://schemas.microsoft.com/office/drawing/2014/main" id="{B198477E-32EB-D45A-EF21-A4FBC6EA7B5A}"/>
               </a:ext>
             </a:extLst>
           </p:cNvPr>
@@ -5741,8 +5741,8 @@
         </p:blipFill>
         <p:spPr>
           <a:xfrm>
-            <a:off x="925758" y="2901802"/>
-            <a:ext cx="10428042" cy="1929660"/>
+            <a:off x="838200" y="2652671"/>
+            <a:ext cx="10805519" cy="1956652"/>
           </a:xfrm>
           <a:prstGeom prst="rect">
             <a:avLst/>
